--- a/3神的威權.pptx
+++ b/3神的威權.pptx
@@ -172,7 +172,7 @@
           <a:lstStyle/>
           <a:p>
             <a:r>
-              <a:rPr lang="en-US" altLang="zh-TW" smtClean="0"/>
+              <a:rPr lang="en-US" altLang="zh-TW"/>
               <a:t>Click to edit Master title style</a:t>
             </a:r>
             <a:endParaRPr lang="zh-TW" altLang="en-US"/>
@@ -291,7 +291,7 @@
           </a:lstStyle>
           <a:p>
             <a:r>
-              <a:rPr lang="en-US" altLang="zh-TW" smtClean="0"/>
+              <a:rPr lang="en-US" altLang="zh-TW"/>
               <a:t>Click to edit Master subtitle style</a:t>
             </a:r>
             <a:endParaRPr lang="zh-TW" altLang="en-US"/>
@@ -316,7 +316,7 @@
             <a:fld id="{86B5546F-C09B-4E63-ABC5-F7C86A7E8D66}" type="datetimeFigureOut">
               <a:rPr lang="en-US" smtClean="0"/>
               <a:pPr/>
-              <a:t>3/11/2023</a:t>
+              <a:t>9/11/2026</a:t>
             </a:fld>
             <a:endParaRPr lang="en-US"/>
           </a:p>
@@ -411,7 +411,7 @@
           <a:lstStyle/>
           <a:p>
             <a:r>
-              <a:rPr lang="en-US" altLang="zh-TW" smtClean="0"/>
+              <a:rPr lang="en-US" altLang="zh-TW"/>
               <a:t>Click to edit Master title style</a:t>
             </a:r>
             <a:endParaRPr lang="zh-TW" altLang="en-US"/>
@@ -435,35 +435,35 @@
           <a:p>
             <a:pPr lvl="0"/>
             <a:r>
-              <a:rPr lang="en-US" altLang="zh-TW" smtClean="0"/>
+              <a:rPr lang="en-US" altLang="zh-TW"/>
               <a:t>Edit Master text styles</a:t>
             </a:r>
           </a:p>
           <a:p>
             <a:pPr lvl="1"/>
             <a:r>
-              <a:rPr lang="en-US" altLang="zh-TW" smtClean="0"/>
+              <a:rPr lang="en-US" altLang="zh-TW"/>
               <a:t>Second level</a:t>
             </a:r>
           </a:p>
           <a:p>
             <a:pPr lvl="2"/>
             <a:r>
-              <a:rPr lang="en-US" altLang="zh-TW" smtClean="0"/>
+              <a:rPr lang="en-US" altLang="zh-TW"/>
               <a:t>Third level</a:t>
             </a:r>
           </a:p>
           <a:p>
             <a:pPr lvl="3"/>
             <a:r>
-              <a:rPr lang="en-US" altLang="zh-TW" smtClean="0"/>
+              <a:rPr lang="en-US" altLang="zh-TW"/>
               <a:t>Fourth level</a:t>
             </a:r>
           </a:p>
           <a:p>
             <a:pPr lvl="4"/>
             <a:r>
-              <a:rPr lang="en-US" altLang="zh-TW" smtClean="0"/>
+              <a:rPr lang="en-US" altLang="zh-TW"/>
               <a:t>Fifth level</a:t>
             </a:r>
             <a:endParaRPr lang="zh-TW" altLang="en-US"/>
@@ -488,7 +488,7 @@
             <a:fld id="{86B5546F-C09B-4E63-ABC5-F7C86A7E8D66}" type="datetimeFigureOut">
               <a:rPr lang="en-US" smtClean="0"/>
               <a:pPr/>
-              <a:t>3/11/2023</a:t>
+              <a:t>9/11/2026</a:t>
             </a:fld>
             <a:endParaRPr lang="en-US"/>
           </a:p>
@@ -588,7 +588,7 @@
           <a:lstStyle/>
           <a:p>
             <a:r>
-              <a:rPr lang="en-US" altLang="zh-TW" smtClean="0"/>
+              <a:rPr lang="en-US" altLang="zh-TW"/>
               <a:t>Click to edit Master title style</a:t>
             </a:r>
             <a:endParaRPr lang="zh-TW" altLang="en-US"/>
@@ -617,35 +617,35 @@
           <a:p>
             <a:pPr lvl="0"/>
             <a:r>
-              <a:rPr lang="en-US" altLang="zh-TW" smtClean="0"/>
+              <a:rPr lang="en-US" altLang="zh-TW"/>
               <a:t>Edit Master text styles</a:t>
             </a:r>
           </a:p>
           <a:p>
             <a:pPr lvl="1"/>
             <a:r>
-              <a:rPr lang="en-US" altLang="zh-TW" smtClean="0"/>
+              <a:rPr lang="en-US" altLang="zh-TW"/>
               <a:t>Second level</a:t>
             </a:r>
           </a:p>
           <a:p>
             <a:pPr lvl="2"/>
             <a:r>
-              <a:rPr lang="en-US" altLang="zh-TW" smtClean="0"/>
+              <a:rPr lang="en-US" altLang="zh-TW"/>
               <a:t>Third level</a:t>
             </a:r>
           </a:p>
           <a:p>
             <a:pPr lvl="3"/>
             <a:r>
-              <a:rPr lang="en-US" altLang="zh-TW" smtClean="0"/>
+              <a:rPr lang="en-US" altLang="zh-TW"/>
               <a:t>Fourth level</a:t>
             </a:r>
           </a:p>
           <a:p>
             <a:pPr lvl="4"/>
             <a:r>
-              <a:rPr lang="en-US" altLang="zh-TW" smtClean="0"/>
+              <a:rPr lang="en-US" altLang="zh-TW"/>
               <a:t>Fifth level</a:t>
             </a:r>
             <a:endParaRPr lang="zh-TW" altLang="en-US"/>
@@ -670,7 +670,7 @@
             <a:fld id="{86B5546F-C09B-4E63-ABC5-F7C86A7E8D66}" type="datetimeFigureOut">
               <a:rPr lang="en-US" smtClean="0"/>
               <a:pPr/>
-              <a:t>3/11/2023</a:t>
+              <a:t>9/11/2026</a:t>
             </a:fld>
             <a:endParaRPr lang="en-US"/>
           </a:p>
@@ -765,7 +765,7 @@
           <a:lstStyle/>
           <a:p>
             <a:r>
-              <a:rPr lang="en-US" altLang="zh-TW" smtClean="0"/>
+              <a:rPr lang="en-US" altLang="zh-TW"/>
               <a:t>Click to edit Master title style</a:t>
             </a:r>
             <a:endParaRPr lang="zh-TW" altLang="en-US"/>
@@ -789,35 +789,35 @@
           <a:p>
             <a:pPr lvl="0"/>
             <a:r>
-              <a:rPr lang="en-US" altLang="zh-TW" smtClean="0"/>
+              <a:rPr lang="en-US" altLang="zh-TW"/>
               <a:t>Edit Master text styles</a:t>
             </a:r>
           </a:p>
           <a:p>
             <a:pPr lvl="1"/>
             <a:r>
-              <a:rPr lang="en-US" altLang="zh-TW" smtClean="0"/>
+              <a:rPr lang="en-US" altLang="zh-TW"/>
               <a:t>Second level</a:t>
             </a:r>
           </a:p>
           <a:p>
             <a:pPr lvl="2"/>
             <a:r>
-              <a:rPr lang="en-US" altLang="zh-TW" smtClean="0"/>
+              <a:rPr lang="en-US" altLang="zh-TW"/>
               <a:t>Third level</a:t>
             </a:r>
           </a:p>
           <a:p>
             <a:pPr lvl="3"/>
             <a:r>
-              <a:rPr lang="en-US" altLang="zh-TW" smtClean="0"/>
+              <a:rPr lang="en-US" altLang="zh-TW"/>
               <a:t>Fourth level</a:t>
             </a:r>
           </a:p>
           <a:p>
             <a:pPr lvl="4"/>
             <a:r>
-              <a:rPr lang="en-US" altLang="zh-TW" smtClean="0"/>
+              <a:rPr lang="en-US" altLang="zh-TW"/>
               <a:t>Fifth level</a:t>
             </a:r>
             <a:endParaRPr lang="zh-TW" altLang="en-US"/>
@@ -842,7 +842,7 @@
             <a:fld id="{86B5546F-C09B-4E63-ABC5-F7C86A7E8D66}" type="datetimeFigureOut">
               <a:rPr lang="en-US" smtClean="0"/>
               <a:pPr/>
-              <a:t>3/11/2023</a:t>
+              <a:t>9/11/2026</a:t>
             </a:fld>
             <a:endParaRPr lang="en-US"/>
           </a:p>
@@ -946,7 +946,7 @@
           </a:lstStyle>
           <a:p>
             <a:r>
-              <a:rPr lang="en-US" altLang="zh-TW" smtClean="0"/>
+              <a:rPr lang="en-US" altLang="zh-TW"/>
               <a:t>Click to edit Master title style</a:t>
             </a:r>
             <a:endParaRPr lang="zh-TW" altLang="en-US"/>
@@ -1066,7 +1066,7 @@
           <a:p>
             <a:pPr lvl="0"/>
             <a:r>
-              <a:rPr lang="en-US" altLang="zh-TW" smtClean="0"/>
+              <a:rPr lang="en-US" altLang="zh-TW"/>
               <a:t>Edit Master text styles</a:t>
             </a:r>
           </a:p>
@@ -1090,7 +1090,7 @@
             <a:fld id="{86B5546F-C09B-4E63-ABC5-F7C86A7E8D66}" type="datetimeFigureOut">
               <a:rPr lang="en-US" smtClean="0"/>
               <a:pPr/>
-              <a:t>3/11/2023</a:t>
+              <a:t>9/11/2026</a:t>
             </a:fld>
             <a:endParaRPr lang="en-US"/>
           </a:p>
@@ -1185,7 +1185,7 @@
           <a:lstStyle/>
           <a:p>
             <a:r>
-              <a:rPr lang="en-US" altLang="zh-TW" smtClean="0"/>
+              <a:rPr lang="en-US" altLang="zh-TW"/>
               <a:t>Click to edit Master title style</a:t>
             </a:r>
             <a:endParaRPr lang="zh-TW" altLang="en-US"/>
@@ -1242,35 +1242,35 @@
           <a:p>
             <a:pPr lvl="0"/>
             <a:r>
-              <a:rPr lang="en-US" altLang="zh-TW" smtClean="0"/>
+              <a:rPr lang="en-US" altLang="zh-TW"/>
               <a:t>Edit Master text styles</a:t>
             </a:r>
           </a:p>
           <a:p>
             <a:pPr lvl="1"/>
             <a:r>
-              <a:rPr lang="en-US" altLang="zh-TW" smtClean="0"/>
+              <a:rPr lang="en-US" altLang="zh-TW"/>
               <a:t>Second level</a:t>
             </a:r>
           </a:p>
           <a:p>
             <a:pPr lvl="2"/>
             <a:r>
-              <a:rPr lang="en-US" altLang="zh-TW" smtClean="0"/>
+              <a:rPr lang="en-US" altLang="zh-TW"/>
               <a:t>Third level</a:t>
             </a:r>
           </a:p>
           <a:p>
             <a:pPr lvl="3"/>
             <a:r>
-              <a:rPr lang="en-US" altLang="zh-TW" smtClean="0"/>
+              <a:rPr lang="en-US" altLang="zh-TW"/>
               <a:t>Fourth level</a:t>
             </a:r>
           </a:p>
           <a:p>
             <a:pPr lvl="4"/>
             <a:r>
-              <a:rPr lang="en-US" altLang="zh-TW" smtClean="0"/>
+              <a:rPr lang="en-US" altLang="zh-TW"/>
               <a:t>Fifth level</a:t>
             </a:r>
             <a:endParaRPr lang="zh-TW" altLang="en-US"/>
@@ -1327,35 +1327,35 @@
           <a:p>
             <a:pPr lvl="0"/>
             <a:r>
-              <a:rPr lang="en-US" altLang="zh-TW" smtClean="0"/>
+              <a:rPr lang="en-US" altLang="zh-TW"/>
               <a:t>Edit Master text styles</a:t>
             </a:r>
           </a:p>
           <a:p>
             <a:pPr lvl="1"/>
             <a:r>
-              <a:rPr lang="en-US" altLang="zh-TW" smtClean="0"/>
+              <a:rPr lang="en-US" altLang="zh-TW"/>
               <a:t>Second level</a:t>
             </a:r>
           </a:p>
           <a:p>
             <a:pPr lvl="2"/>
             <a:r>
-              <a:rPr lang="en-US" altLang="zh-TW" smtClean="0"/>
+              <a:rPr lang="en-US" altLang="zh-TW"/>
               <a:t>Third level</a:t>
             </a:r>
           </a:p>
           <a:p>
             <a:pPr lvl="3"/>
             <a:r>
-              <a:rPr lang="en-US" altLang="zh-TW" smtClean="0"/>
+              <a:rPr lang="en-US" altLang="zh-TW"/>
               <a:t>Fourth level</a:t>
             </a:r>
           </a:p>
           <a:p>
             <a:pPr lvl="4"/>
             <a:r>
-              <a:rPr lang="en-US" altLang="zh-TW" smtClean="0"/>
+              <a:rPr lang="en-US" altLang="zh-TW"/>
               <a:t>Fifth level</a:t>
             </a:r>
             <a:endParaRPr lang="zh-TW" altLang="en-US"/>
@@ -1380,7 +1380,7 @@
             <a:fld id="{86B5546F-C09B-4E63-ABC5-F7C86A7E8D66}" type="datetimeFigureOut">
               <a:rPr lang="en-US" smtClean="0"/>
               <a:pPr/>
-              <a:t>3/11/2023</a:t>
+              <a:t>9/11/2026</a:t>
             </a:fld>
             <a:endParaRPr lang="en-US"/>
           </a:p>
@@ -1479,7 +1479,7 @@
           </a:lstStyle>
           <a:p>
             <a:r>
-              <a:rPr lang="en-US" altLang="zh-TW" smtClean="0"/>
+              <a:rPr lang="en-US" altLang="zh-TW"/>
               <a:t>Click to edit Master title style</a:t>
             </a:r>
             <a:endParaRPr lang="zh-TW" altLang="en-US"/>
@@ -1545,7 +1545,7 @@
           <a:p>
             <a:pPr lvl="0"/>
             <a:r>
-              <a:rPr lang="en-US" altLang="zh-TW" smtClean="0"/>
+              <a:rPr lang="en-US" altLang="zh-TW"/>
               <a:t>Edit Master text styles</a:t>
             </a:r>
           </a:p>
@@ -1601,35 +1601,35 @@
           <a:p>
             <a:pPr lvl="0"/>
             <a:r>
-              <a:rPr lang="en-US" altLang="zh-TW" smtClean="0"/>
+              <a:rPr lang="en-US" altLang="zh-TW"/>
               <a:t>Edit Master text styles</a:t>
             </a:r>
           </a:p>
           <a:p>
             <a:pPr lvl="1"/>
             <a:r>
-              <a:rPr lang="en-US" altLang="zh-TW" smtClean="0"/>
+              <a:rPr lang="en-US" altLang="zh-TW"/>
               <a:t>Second level</a:t>
             </a:r>
           </a:p>
           <a:p>
             <a:pPr lvl="2"/>
             <a:r>
-              <a:rPr lang="en-US" altLang="zh-TW" smtClean="0"/>
+              <a:rPr lang="en-US" altLang="zh-TW"/>
               <a:t>Third level</a:t>
             </a:r>
           </a:p>
           <a:p>
             <a:pPr lvl="3"/>
             <a:r>
-              <a:rPr lang="en-US" altLang="zh-TW" smtClean="0"/>
+              <a:rPr lang="en-US" altLang="zh-TW"/>
               <a:t>Fourth level</a:t>
             </a:r>
           </a:p>
           <a:p>
             <a:pPr lvl="4"/>
             <a:r>
-              <a:rPr lang="en-US" altLang="zh-TW" smtClean="0"/>
+              <a:rPr lang="en-US" altLang="zh-TW"/>
               <a:t>Fifth level</a:t>
             </a:r>
             <a:endParaRPr lang="zh-TW" altLang="en-US"/>
@@ -1695,7 +1695,7 @@
           <a:p>
             <a:pPr lvl="0"/>
             <a:r>
-              <a:rPr lang="en-US" altLang="zh-TW" smtClean="0"/>
+              <a:rPr lang="en-US" altLang="zh-TW"/>
               <a:t>Edit Master text styles</a:t>
             </a:r>
           </a:p>
@@ -1751,35 +1751,35 @@
           <a:p>
             <a:pPr lvl="0"/>
             <a:r>
-              <a:rPr lang="en-US" altLang="zh-TW" smtClean="0"/>
+              <a:rPr lang="en-US" altLang="zh-TW"/>
               <a:t>Edit Master text styles</a:t>
             </a:r>
           </a:p>
           <a:p>
             <a:pPr lvl="1"/>
             <a:r>
-              <a:rPr lang="en-US" altLang="zh-TW" smtClean="0"/>
+              <a:rPr lang="en-US" altLang="zh-TW"/>
               <a:t>Second level</a:t>
             </a:r>
           </a:p>
           <a:p>
             <a:pPr lvl="2"/>
             <a:r>
-              <a:rPr lang="en-US" altLang="zh-TW" smtClean="0"/>
+              <a:rPr lang="en-US" altLang="zh-TW"/>
               <a:t>Third level</a:t>
             </a:r>
           </a:p>
           <a:p>
             <a:pPr lvl="3"/>
             <a:r>
-              <a:rPr lang="en-US" altLang="zh-TW" smtClean="0"/>
+              <a:rPr lang="en-US" altLang="zh-TW"/>
               <a:t>Fourth level</a:t>
             </a:r>
           </a:p>
           <a:p>
             <a:pPr lvl="4"/>
             <a:r>
-              <a:rPr lang="en-US" altLang="zh-TW" smtClean="0"/>
+              <a:rPr lang="en-US" altLang="zh-TW"/>
               <a:t>Fifth level</a:t>
             </a:r>
             <a:endParaRPr lang="zh-TW" altLang="en-US"/>
@@ -1804,7 +1804,7 @@
             <a:fld id="{86B5546F-C09B-4E63-ABC5-F7C86A7E8D66}" type="datetimeFigureOut">
               <a:rPr lang="en-US" smtClean="0"/>
               <a:pPr/>
-              <a:t>3/11/2023</a:t>
+              <a:t>9/11/2026</a:t>
             </a:fld>
             <a:endParaRPr lang="en-US"/>
           </a:p>
@@ -1899,7 +1899,7 @@
           <a:lstStyle/>
           <a:p>
             <a:r>
-              <a:rPr lang="en-US" altLang="zh-TW" smtClean="0"/>
+              <a:rPr lang="en-US" altLang="zh-TW"/>
               <a:t>Click to edit Master title style</a:t>
             </a:r>
             <a:endParaRPr lang="zh-TW" altLang="en-US"/>
@@ -1924,7 +1924,7 @@
             <a:fld id="{86B5546F-C09B-4E63-ABC5-F7C86A7E8D66}" type="datetimeFigureOut">
               <a:rPr lang="en-US" smtClean="0"/>
               <a:pPr/>
-              <a:t>3/11/2023</a:t>
+              <a:t>9/11/2026</a:t>
             </a:fld>
             <a:endParaRPr lang="en-US"/>
           </a:p>
@@ -2021,7 +2021,7 @@
             <a:fld id="{86B5546F-C09B-4E63-ABC5-F7C86A7E8D66}" type="datetimeFigureOut">
               <a:rPr lang="en-US" smtClean="0"/>
               <a:pPr/>
-              <a:t>3/11/2023</a:t>
+              <a:t>9/11/2026</a:t>
             </a:fld>
             <a:endParaRPr lang="en-US"/>
           </a:p>
@@ -2125,7 +2125,7 @@
           </a:lstStyle>
           <a:p>
             <a:r>
-              <a:rPr lang="en-US" altLang="zh-TW" smtClean="0"/>
+              <a:rPr lang="en-US" altLang="zh-TW"/>
               <a:t>Click to edit Master title style</a:t>
             </a:r>
             <a:endParaRPr lang="zh-TW" altLang="en-US"/>
@@ -2182,35 +2182,35 @@
           <a:p>
             <a:pPr lvl="0"/>
             <a:r>
-              <a:rPr lang="en-US" altLang="zh-TW" smtClean="0"/>
+              <a:rPr lang="en-US" altLang="zh-TW"/>
               <a:t>Edit Master text styles</a:t>
             </a:r>
           </a:p>
           <a:p>
             <a:pPr lvl="1"/>
             <a:r>
-              <a:rPr lang="en-US" altLang="zh-TW" smtClean="0"/>
+              <a:rPr lang="en-US" altLang="zh-TW"/>
               <a:t>Second level</a:t>
             </a:r>
           </a:p>
           <a:p>
             <a:pPr lvl="2"/>
             <a:r>
-              <a:rPr lang="en-US" altLang="zh-TW" smtClean="0"/>
+              <a:rPr lang="en-US" altLang="zh-TW"/>
               <a:t>Third level</a:t>
             </a:r>
           </a:p>
           <a:p>
             <a:pPr lvl="3"/>
             <a:r>
-              <a:rPr lang="en-US" altLang="zh-TW" smtClean="0"/>
+              <a:rPr lang="en-US" altLang="zh-TW"/>
               <a:t>Fourth level</a:t>
             </a:r>
           </a:p>
           <a:p>
             <a:pPr lvl="4"/>
             <a:r>
-              <a:rPr lang="en-US" altLang="zh-TW" smtClean="0"/>
+              <a:rPr lang="en-US" altLang="zh-TW"/>
               <a:t>Fifth level</a:t>
             </a:r>
             <a:endParaRPr lang="zh-TW" altLang="en-US"/>
@@ -2276,7 +2276,7 @@
           <a:p>
             <a:pPr lvl="0"/>
             <a:r>
-              <a:rPr lang="en-US" altLang="zh-TW" smtClean="0"/>
+              <a:rPr lang="en-US" altLang="zh-TW"/>
               <a:t>Edit Master text styles</a:t>
             </a:r>
           </a:p>
@@ -2300,7 +2300,7 @@
             <a:fld id="{86B5546F-C09B-4E63-ABC5-F7C86A7E8D66}" type="datetimeFigureOut">
               <a:rPr lang="en-US" smtClean="0"/>
               <a:pPr/>
-              <a:t>3/11/2023</a:t>
+              <a:t>9/11/2026</a:t>
             </a:fld>
             <a:endParaRPr lang="en-US"/>
           </a:p>
@@ -2404,7 +2404,7 @@
           </a:lstStyle>
           <a:p>
             <a:r>
-              <a:rPr lang="en-US" altLang="zh-TW" smtClean="0"/>
+              <a:rPr lang="en-US" altLang="zh-TW"/>
               <a:t>Click to edit Master title style</a:t>
             </a:r>
             <a:endParaRPr lang="zh-TW" altLang="en-US"/>
@@ -2469,7 +2469,7 @@
           </a:lstStyle>
           <a:p>
             <a:r>
-              <a:rPr lang="en-US" altLang="zh-TW" smtClean="0"/>
+              <a:rPr lang="en-US" altLang="zh-TW"/>
               <a:t>Click icon to add picture</a:t>
             </a:r>
             <a:endParaRPr lang="zh-TW" altLang="en-US"/>
@@ -2535,7 +2535,7 @@
           <a:p>
             <a:pPr lvl="0"/>
             <a:r>
-              <a:rPr lang="en-US" altLang="zh-TW" smtClean="0"/>
+              <a:rPr lang="en-US" altLang="zh-TW"/>
               <a:t>Edit Master text styles</a:t>
             </a:r>
           </a:p>
@@ -2559,7 +2559,7 @@
             <a:fld id="{86B5546F-C09B-4E63-ABC5-F7C86A7E8D66}" type="datetimeFigureOut">
               <a:rPr lang="en-US" smtClean="0"/>
               <a:pPr/>
-              <a:t>3/11/2023</a:t>
+              <a:t>9/11/2026</a:t>
             </a:fld>
             <a:endParaRPr lang="en-US"/>
           </a:p>
@@ -2674,10 +2674,9 @@
           <a:lstStyle/>
           <a:p>
             <a:r>
-              <a:rPr lang="zh-TW" altLang="en-US" smtClean="0"/>
+              <a:rPr lang="zh-TW" altLang="en-US"/>
               <a:t>按一下以編輯母片標題樣式</a:t>
             </a:r>
-            <a:endParaRPr lang="zh-TW" altLang="en-US"/>
           </a:p>
         </p:txBody>
       </p:sp>
@@ -2708,38 +2707,37 @@
           <a:p>
             <a:pPr lvl="0"/>
             <a:r>
-              <a:rPr lang="zh-TW" altLang="en-US" smtClean="0"/>
+              <a:rPr lang="zh-TW" altLang="en-US"/>
               <a:t>按一下以編輯母片文字樣式</a:t>
             </a:r>
           </a:p>
           <a:p>
             <a:pPr lvl="1"/>
             <a:r>
-              <a:rPr lang="zh-TW" altLang="en-US" smtClean="0"/>
+              <a:rPr lang="zh-TW" altLang="en-US"/>
               <a:t>第二層</a:t>
             </a:r>
           </a:p>
           <a:p>
             <a:pPr lvl="2"/>
             <a:r>
-              <a:rPr lang="zh-TW" altLang="en-US" smtClean="0"/>
+              <a:rPr lang="zh-TW" altLang="en-US"/>
               <a:t>第三層</a:t>
             </a:r>
           </a:p>
           <a:p>
             <a:pPr lvl="3"/>
             <a:r>
-              <a:rPr lang="zh-TW" altLang="en-US" smtClean="0"/>
+              <a:rPr lang="zh-TW" altLang="en-US"/>
               <a:t>第四層</a:t>
             </a:r>
           </a:p>
           <a:p>
             <a:pPr lvl="4"/>
             <a:r>
-              <a:rPr lang="zh-TW" altLang="en-US" smtClean="0"/>
+              <a:rPr lang="zh-TW" altLang="en-US"/>
               <a:t>第五層</a:t>
             </a:r>
-            <a:endParaRPr lang="zh-TW" altLang="en-US"/>
           </a:p>
         </p:txBody>
       </p:sp>
@@ -2779,7 +2777,7 @@
             <a:fld id="{86B5546F-C09B-4E63-ABC5-F7C86A7E8D66}" type="datetimeFigureOut">
               <a:rPr lang="en-US" smtClean="0"/>
               <a:pPr/>
-              <a:t>3/11/2023</a:t>
+              <a:t>9/11/2026</a:t>
             </a:fld>
             <a:endParaRPr lang="en-US"/>
           </a:p>
@@ -3224,7 +3222,7 @@
           <a:lstStyle/>
           <a:p>
             <a:r>
-              <a:rPr lang="zh-CN" altLang="en-US" b="1" dirty="0" smtClean="0">
+              <a:rPr lang="zh-CN" altLang="en-US" b="1" dirty="0">
                 <a:solidFill>
                   <a:srgbClr val="000066"/>
                 </a:solidFill>
@@ -3234,7 +3232,7 @@
               <a:t>詩 </a:t>
             </a:r>
             <a:r>
-              <a:rPr lang="en-US" altLang="zh-CN" b="1" dirty="0" smtClean="0">
+              <a:rPr lang="en-US" altLang="zh-CN" b="1" dirty="0">
                 <a:solidFill>
                   <a:srgbClr val="000066"/>
                 </a:solidFill>
@@ -3254,7 +3252,7 @@
               <a:t>：</a:t>
             </a:r>
             <a:r>
-              <a:rPr lang="en-US" altLang="zh-CN" b="1" dirty="0" smtClean="0">
+              <a:rPr lang="en-US" altLang="zh-CN" b="1" dirty="0">
                 <a:solidFill>
                   <a:srgbClr val="000066"/>
                 </a:solidFill>
@@ -3264,7 +3262,7 @@
               <a:t>1 – 2</a:t>
             </a:r>
             <a:r>
-              <a:rPr lang="zh-CN" altLang="en-US" b="1" dirty="0" smtClean="0">
+              <a:rPr lang="zh-CN" altLang="en-US" b="1" dirty="0">
                 <a:solidFill>
                   <a:srgbClr val="000066"/>
                 </a:solidFill>
@@ -3274,7 +3272,7 @@
               <a:t>，</a:t>
             </a:r>
             <a:r>
-              <a:rPr lang="en-US" altLang="zh-CN" b="1" dirty="0" smtClean="0">
+              <a:rPr lang="en-US" altLang="zh-CN" b="1" dirty="0">
                 <a:solidFill>
                   <a:srgbClr val="000066"/>
                 </a:solidFill>
@@ -3284,7 +3282,7 @@
               <a:t>4 – 5</a:t>
             </a:r>
             <a:r>
-              <a:rPr lang="zh-CN" altLang="en-US" b="1" dirty="0" smtClean="0">
+              <a:rPr lang="zh-CN" altLang="en-US" b="1" dirty="0">
                 <a:solidFill>
                   <a:srgbClr val="000066"/>
                 </a:solidFill>
@@ -3314,7 +3312,7 @@
               <a:t>：</a:t>
             </a:r>
             <a:r>
-              <a:rPr lang="en-US" altLang="zh-CN" b="1" dirty="0" smtClean="0">
+              <a:rPr lang="en-US" altLang="zh-CN" b="1" dirty="0">
                 <a:solidFill>
                   <a:srgbClr val="000066"/>
                 </a:solidFill>
@@ -3326,7 +3324,7 @@
           </a:p>
           <a:p>
             <a:r>
-              <a:rPr lang="en-US" altLang="zh-CN" b="1" dirty="0" smtClean="0">
+              <a:rPr lang="en-US" altLang="zh-CN" b="1" dirty="0">
                 <a:solidFill>
                   <a:srgbClr val="000066"/>
                 </a:solidFill>
@@ -3346,7 +3344,7 @@
               <a:t>：</a:t>
             </a:r>
             <a:r>
-              <a:rPr lang="en-US" altLang="zh-CN" b="1" dirty="0" smtClean="0">
+              <a:rPr lang="en-US" altLang="zh-CN" b="1" dirty="0">
                 <a:solidFill>
                   <a:srgbClr val="000066"/>
                 </a:solidFill>
@@ -3356,7 +3354,7 @@
               <a:t>1 – 6</a:t>
             </a:r>
             <a:r>
-              <a:rPr lang="zh-CN" altLang="en-US" b="1" dirty="0" smtClean="0">
+              <a:rPr lang="zh-CN" altLang="en-US" b="1" dirty="0">
                 <a:solidFill>
                   <a:srgbClr val="000066"/>
                 </a:solidFill>
@@ -3376,7 +3374,7 @@
               <a:t>18</a:t>
             </a:r>
             <a:r>
-              <a:rPr lang="zh-CN" altLang="en-US" b="1" dirty="0" smtClean="0">
+              <a:rPr lang="zh-CN" altLang="en-US" b="1" dirty="0">
                 <a:solidFill>
                   <a:srgbClr val="000066"/>
                 </a:solidFill>
@@ -3393,17 +3391,7 @@
                 <a:latin typeface="微軟正黑體" pitchFamily="34" charset="-120"/>
                 <a:ea typeface="微軟正黑體" pitchFamily="34" charset="-120"/>
               </a:rPr>
-              <a:t>4</a:t>
-            </a:r>
-            <a:r>
-              <a:rPr lang="en-US" altLang="zh-CN" b="1" dirty="0" smtClean="0">
-                <a:solidFill>
-                  <a:srgbClr val="000066"/>
-                </a:solidFill>
-                <a:latin typeface="微軟正黑體" pitchFamily="34" charset="-120"/>
-                <a:ea typeface="微軟正黑體" pitchFamily="34" charset="-120"/>
-              </a:rPr>
-              <a:t>6</a:t>
+              <a:t>46</a:t>
             </a:r>
             <a:endParaRPr lang="en-US" b="1" dirty="0">
               <a:solidFill>
@@ -3425,13 +3413,6 @@
   <p:clrMapOvr>
     <a:masterClrMapping/>
   </p:clrMapOvr>
-  <p:timing>
-    <p:tnLst>
-      <p:par>
-        <p:cTn id="1" dur="indefinite" restart="never" nodeType="tmRoot"/>
-      </p:par>
-    </p:tnLst>
-  </p:timing>
 </p:sld>
 </file>
 
@@ -3482,20 +3463,10 @@
                 <a:latin typeface="微軟正黑體" pitchFamily="34" charset="-120"/>
                 <a:ea typeface="微軟正黑體" pitchFamily="34" charset="-120"/>
               </a:rPr>
-              <a:t>耶和華作王</a:t>
-            </a:r>
-            <a:r>
-              <a:rPr lang="zh-TW" altLang="en-US" sz="4800" dirty="0" smtClean="0">
-                <a:solidFill>
-                  <a:srgbClr val="660033"/>
-                </a:solidFill>
-                <a:latin typeface="微軟正黑體" pitchFamily="34" charset="-120"/>
-                <a:ea typeface="微軟正黑體" pitchFamily="34" charset="-120"/>
-              </a:rPr>
-              <a:t>！</a:t>
-            </a:r>
-            <a:r>
-              <a:rPr lang="zh-CN" altLang="en-US" sz="4800" dirty="0" smtClean="0">
+              <a:t>耶和華作王！</a:t>
+            </a:r>
+            <a:r>
+              <a:rPr lang="zh-CN" altLang="en-US" sz="4800" dirty="0">
                 <a:solidFill>
                   <a:srgbClr val="660033"/>
                 </a:solidFill>
@@ -3505,16 +3476,6 @@
               <a:t>祂</a:t>
             </a:r>
             <a:r>
-              <a:rPr lang="zh-TW" altLang="en-US" sz="4800" dirty="0" smtClean="0">
-                <a:solidFill>
-                  <a:srgbClr val="660033"/>
-                </a:solidFill>
-                <a:latin typeface="微軟正黑體" pitchFamily="34" charset="-120"/>
-                <a:ea typeface="微軟正黑體" pitchFamily="34" charset="-120"/>
-              </a:rPr>
-              <a:t>以</a:t>
-            </a:r>
-            <a:r>
               <a:rPr lang="zh-TW" altLang="en-US" sz="4800" dirty="0">
                 <a:solidFill>
                   <a:srgbClr val="660033"/>
@@ -3522,7 +3483,7 @@
                 <a:latin typeface="微軟正黑體" pitchFamily="34" charset="-120"/>
                 <a:ea typeface="微軟正黑體" pitchFamily="34" charset="-120"/>
               </a:rPr>
-              <a:t>威嚴為衣穿上；耶和華以能力為衣，以能力束腰，世界就堅定，不得動搖。</a:t>
+              <a:t>以威嚴為衣穿上；耶和華以能力為衣，以能力束腰，世界就堅定，不得動搖。</a:t>
             </a:r>
             <a:r>
               <a:rPr lang="en-US" altLang="zh-TW" sz="4800" dirty="0">
@@ -3537,24 +3498,14 @@
           </a:p>
           <a:p>
             <a:r>
-              <a:rPr lang="zh-CN" altLang="en-US" sz="4800" b="1" dirty="0" smtClean="0">
-                <a:solidFill>
-                  <a:srgbClr val="660033"/>
-                </a:solidFill>
-                <a:latin typeface="微軟正黑體" pitchFamily="34" charset="-120"/>
-                <a:ea typeface="微軟正黑體" pitchFamily="34" charset="-120"/>
-              </a:rPr>
-              <a:t>袮</a:t>
-            </a:r>
-            <a:r>
-              <a:rPr lang="zh-TW" altLang="en-US" sz="4800" b="1" dirty="0" smtClean="0">
-                <a:solidFill>
-                  <a:srgbClr val="660033"/>
-                </a:solidFill>
-                <a:latin typeface="微軟正黑體" pitchFamily="34" charset="-120"/>
-                <a:ea typeface="微軟正黑體" pitchFamily="34" charset="-120"/>
-              </a:rPr>
-              <a:t>的</a:t>
+              <a:rPr lang="zh-CN" altLang="en-US" sz="4800" b="1" dirty="0">
+                <a:solidFill>
+                  <a:srgbClr val="660033"/>
+                </a:solidFill>
+                <a:latin typeface="微軟正黑體" pitchFamily="34" charset="-120"/>
+                <a:ea typeface="微軟正黑體" pitchFamily="34" charset="-120"/>
+              </a:rPr>
+              <a:t>祢</a:t>
             </a:r>
             <a:r>
               <a:rPr lang="zh-TW" altLang="en-US" sz="4800" b="1" dirty="0">
@@ -3564,17 +3515,7 @@
                 <a:latin typeface="微軟正黑體" pitchFamily="34" charset="-120"/>
                 <a:ea typeface="微軟正黑體" pitchFamily="34" charset="-120"/>
               </a:rPr>
-              <a:t>寶座從太初立定</a:t>
-            </a:r>
-            <a:r>
-              <a:rPr lang="zh-TW" altLang="en-US" sz="4800" b="1" dirty="0" smtClean="0">
-                <a:solidFill>
-                  <a:srgbClr val="660033"/>
-                </a:solidFill>
-                <a:latin typeface="微軟正黑體" pitchFamily="34" charset="-120"/>
-                <a:ea typeface="微軟正黑體" pitchFamily="34" charset="-120"/>
-              </a:rPr>
-              <a:t>；</a:t>
+              <a:t>的寶座從太初立定；</a:t>
             </a:r>
             <a:r>
               <a:rPr lang="zh-CN" altLang="en-US" sz="4800" b="1" dirty="0">
@@ -3584,17 +3525,7 @@
                 <a:latin typeface="微軟正黑體" pitchFamily="34" charset="-120"/>
                 <a:ea typeface="微軟正黑體" pitchFamily="34" charset="-120"/>
               </a:rPr>
-              <a:t>袮</a:t>
-            </a:r>
-            <a:r>
-              <a:rPr lang="zh-TW" altLang="en-US" sz="4800" b="1" dirty="0" smtClean="0">
-                <a:solidFill>
-                  <a:srgbClr val="660033"/>
-                </a:solidFill>
-                <a:latin typeface="微軟正黑體" pitchFamily="34" charset="-120"/>
-                <a:ea typeface="微軟正黑體" pitchFamily="34" charset="-120"/>
-              </a:rPr>
-              <a:t>從</a:t>
+              <a:t>祢</a:t>
             </a:r>
             <a:r>
               <a:rPr lang="zh-TW" altLang="en-US" sz="4800" b="1" dirty="0">
@@ -3604,7 +3535,7 @@
                 <a:latin typeface="微軟正黑體" pitchFamily="34" charset="-120"/>
                 <a:ea typeface="微軟正黑體" pitchFamily="34" charset="-120"/>
               </a:rPr>
-              <a:t>亙古就有。</a:t>
+              <a:t>從亙古就有。</a:t>
             </a:r>
           </a:p>
         </p:txBody>
@@ -3688,17 +3619,7 @@
                 <a:latin typeface="微軟正黑體" pitchFamily="34" charset="-120"/>
                 <a:ea typeface="微軟正黑體" pitchFamily="34" charset="-120"/>
               </a:rPr>
-              <a:t>耶和華啊</a:t>
-            </a:r>
-            <a:r>
-              <a:rPr lang="zh-TW" altLang="en-US" sz="4800" b="1" dirty="0" smtClean="0">
-                <a:solidFill>
-                  <a:srgbClr val="660033"/>
-                </a:solidFill>
-                <a:latin typeface="微軟正黑體" pitchFamily="34" charset="-120"/>
-                <a:ea typeface="微軟正黑體" pitchFamily="34" charset="-120"/>
-              </a:rPr>
-              <a:t>，</a:t>
+              <a:t>耶和華啊，</a:t>
             </a:r>
             <a:r>
               <a:rPr lang="zh-CN" altLang="en-US" sz="4800" b="1" dirty="0">
@@ -3708,17 +3629,7 @@
                 <a:latin typeface="微軟正黑體" pitchFamily="34" charset="-120"/>
                 <a:ea typeface="微軟正黑體" pitchFamily="34" charset="-120"/>
               </a:rPr>
-              <a:t>袮</a:t>
-            </a:r>
-            <a:r>
-              <a:rPr lang="zh-TW" altLang="en-US" sz="4800" b="1" dirty="0" smtClean="0">
-                <a:solidFill>
-                  <a:srgbClr val="660033"/>
-                </a:solidFill>
-                <a:latin typeface="微軟正黑體" pitchFamily="34" charset="-120"/>
-                <a:ea typeface="微軟正黑體" pitchFamily="34" charset="-120"/>
-              </a:rPr>
-              <a:t>的</a:t>
+              <a:t>祢</a:t>
             </a:r>
             <a:r>
               <a:rPr lang="zh-TW" altLang="en-US" sz="4800" b="1" dirty="0">
@@ -3728,17 +3639,7 @@
                 <a:latin typeface="微軟正黑體" pitchFamily="34" charset="-120"/>
                 <a:ea typeface="微軟正黑體" pitchFamily="34" charset="-120"/>
               </a:rPr>
-              <a:t>法度最的確</a:t>
-            </a:r>
-            <a:r>
-              <a:rPr lang="zh-TW" altLang="en-US" sz="4800" b="1" dirty="0" smtClean="0">
-                <a:solidFill>
-                  <a:srgbClr val="660033"/>
-                </a:solidFill>
-                <a:latin typeface="微軟正黑體" pitchFamily="34" charset="-120"/>
-                <a:ea typeface="微軟正黑體" pitchFamily="34" charset="-120"/>
-              </a:rPr>
-              <a:t>；</a:t>
+              <a:t>的法度最的確；</a:t>
             </a:r>
             <a:r>
               <a:rPr lang="zh-CN" altLang="en-US" sz="4800" b="1" dirty="0">
@@ -3748,17 +3649,7 @@
                 <a:latin typeface="微軟正黑體" pitchFamily="34" charset="-120"/>
                 <a:ea typeface="微軟正黑體" pitchFamily="34" charset="-120"/>
               </a:rPr>
-              <a:t>袮</a:t>
-            </a:r>
-            <a:r>
-              <a:rPr lang="zh-TW" altLang="en-US" sz="4800" b="1" dirty="0" smtClean="0">
-                <a:solidFill>
-                  <a:srgbClr val="660033"/>
-                </a:solidFill>
-                <a:latin typeface="微軟正黑體" pitchFamily="34" charset="-120"/>
-                <a:ea typeface="微軟正黑體" pitchFamily="34" charset="-120"/>
-              </a:rPr>
-              <a:t>的</a:t>
+              <a:t>祢</a:t>
             </a:r>
             <a:r>
               <a:rPr lang="zh-TW" altLang="en-US" sz="4800" b="1" dirty="0">
@@ -3768,7 +3659,7 @@
                 <a:latin typeface="微軟正黑體" pitchFamily="34" charset="-120"/>
                 <a:ea typeface="微軟正黑體" pitchFamily="34" charset="-120"/>
               </a:rPr>
-              <a:t>殿永稱為聖，是合宜的。</a:t>
+              <a:t>的殿永稱為聖，是合宜的。</a:t>
             </a:r>
             <a:endParaRPr lang="en-US" altLang="zh-TW" sz="4800" b="1" dirty="0">
               <a:solidFill>
@@ -3855,7 +3746,7 @@
           </a:p>
           <a:p>
             <a:r>
-              <a:rPr lang="zh-CN" altLang="en-US" sz="4800" b="1" dirty="0" smtClean="0">
+              <a:rPr lang="zh-CN" altLang="en-US" sz="4800" b="1" dirty="0">
                 <a:solidFill>
                   <a:srgbClr val="660033"/>
                 </a:solidFill>
@@ -3865,16 +3756,6 @@
               <a:t>祂</a:t>
             </a:r>
             <a:r>
-              <a:rPr lang="zh-TW" altLang="en-US" sz="4800" b="1" dirty="0" smtClean="0">
-                <a:solidFill>
-                  <a:srgbClr val="660033"/>
-                </a:solidFill>
-                <a:latin typeface="微軟正黑體" pitchFamily="34" charset="-120"/>
-                <a:ea typeface="微軟正黑體" pitchFamily="34" charset="-120"/>
-              </a:rPr>
-              <a:t>把</a:t>
-            </a:r>
-            <a:r>
               <a:rPr lang="zh-TW" altLang="en-US" sz="4800" b="1" dirty="0">
                 <a:solidFill>
                   <a:srgbClr val="660033"/>
@@ -3882,7 +3763,7 @@
                 <a:latin typeface="微軟正黑體" pitchFamily="34" charset="-120"/>
                 <a:ea typeface="微軟正黑體" pitchFamily="34" charset="-120"/>
               </a:rPr>
-              <a:t>地建立在海上，安定在大水之上。</a:t>
+              <a:t>把地建立在海上，安定在大水之上。</a:t>
             </a:r>
             <a:endParaRPr lang="en-US" altLang="zh-TW" sz="4800" b="1" dirty="0">
               <a:solidFill>
@@ -3901,20 +3782,10 @@
                 <a:latin typeface="微軟正黑體" pitchFamily="34" charset="-120"/>
                 <a:ea typeface="微軟正黑體" pitchFamily="34" charset="-120"/>
               </a:rPr>
-              <a:t>誰能登耶和華的山？誰能站</a:t>
-            </a:r>
-            <a:r>
-              <a:rPr lang="zh-TW" altLang="en-US" sz="4800" dirty="0" smtClean="0">
-                <a:solidFill>
-                  <a:srgbClr val="660033"/>
-                </a:solidFill>
-                <a:latin typeface="微軟正黑體" pitchFamily="34" charset="-120"/>
-                <a:ea typeface="微軟正黑體" pitchFamily="34" charset="-120"/>
-              </a:rPr>
-              <a:t>在</a:t>
-            </a:r>
-            <a:r>
-              <a:rPr lang="zh-CN" altLang="en-US" sz="4800" dirty="0" smtClean="0">
+              <a:t>誰能登耶和華的山？誰能站在</a:t>
+            </a:r>
+            <a:r>
+              <a:rPr lang="zh-CN" altLang="en-US" sz="4800" dirty="0">
                 <a:solidFill>
                   <a:srgbClr val="660033"/>
                 </a:solidFill>
@@ -3924,16 +3795,6 @@
               <a:t>祂</a:t>
             </a:r>
             <a:r>
-              <a:rPr lang="zh-TW" altLang="en-US" sz="4800" dirty="0" smtClean="0">
-                <a:solidFill>
-                  <a:srgbClr val="660033"/>
-                </a:solidFill>
-                <a:latin typeface="微軟正黑體" pitchFamily="34" charset="-120"/>
-                <a:ea typeface="微軟正黑體" pitchFamily="34" charset="-120"/>
-              </a:rPr>
-              <a:t>的</a:t>
-            </a:r>
-            <a:r>
               <a:rPr lang="zh-TW" altLang="en-US" sz="4800" dirty="0">
                 <a:solidFill>
                   <a:srgbClr val="660033"/>
@@ -3941,7 +3802,7 @@
                 <a:latin typeface="微軟正黑體" pitchFamily="34" charset="-120"/>
                 <a:ea typeface="微軟正黑體" pitchFamily="34" charset="-120"/>
               </a:rPr>
-              <a:t>聖所？</a:t>
+              <a:t>的聖所？</a:t>
             </a:r>
             <a:r>
               <a:rPr lang="en-US" altLang="zh-TW" sz="4800" dirty="0">
@@ -4057,20 +3918,10 @@
                 <a:latin typeface="微軟正黑體" pitchFamily="34" charset="-120"/>
                 <a:ea typeface="微軟正黑體" pitchFamily="34" charset="-120"/>
               </a:rPr>
-              <a:t>密雲和幽暗</a:t>
-            </a:r>
-            <a:r>
-              <a:rPr lang="zh-TW" altLang="en-US" sz="4800" b="1" dirty="0" smtClean="0">
-                <a:solidFill>
-                  <a:srgbClr val="660033"/>
-                </a:solidFill>
-                <a:latin typeface="微軟正黑體" pitchFamily="34" charset="-120"/>
-                <a:ea typeface="微軟正黑體" pitchFamily="34" charset="-120"/>
-              </a:rPr>
-              <a:t>在</a:t>
-            </a:r>
-            <a:r>
-              <a:rPr lang="zh-CN" altLang="en-US" sz="4800" b="1" dirty="0" smtClean="0">
+              <a:t>密雲和幽暗在</a:t>
+            </a:r>
+            <a:r>
+              <a:rPr lang="zh-CN" altLang="en-US" sz="4800" b="1" dirty="0">
                 <a:solidFill>
                   <a:srgbClr val="660033"/>
                 </a:solidFill>
@@ -4080,16 +3931,6 @@
               <a:t>祂</a:t>
             </a:r>
             <a:r>
-              <a:rPr lang="zh-TW" altLang="en-US" sz="4800" b="1" dirty="0" smtClean="0">
-                <a:solidFill>
-                  <a:srgbClr val="660033"/>
-                </a:solidFill>
-                <a:latin typeface="微軟正黑體" pitchFamily="34" charset="-120"/>
-                <a:ea typeface="微軟正黑體" pitchFamily="34" charset="-120"/>
-              </a:rPr>
-              <a:t>的</a:t>
-            </a:r>
-            <a:r>
               <a:rPr lang="zh-TW" altLang="en-US" sz="4800" b="1" dirty="0">
                 <a:solidFill>
                   <a:srgbClr val="660033"/>
@@ -4097,20 +3938,10 @@
                 <a:latin typeface="微軟正黑體" pitchFamily="34" charset="-120"/>
                 <a:ea typeface="微軟正黑體" pitchFamily="34" charset="-120"/>
               </a:rPr>
-              <a:t>四圍；公義和公平</a:t>
-            </a:r>
-            <a:r>
-              <a:rPr lang="zh-TW" altLang="en-US" sz="4800" b="1" dirty="0" smtClean="0">
-                <a:solidFill>
-                  <a:srgbClr val="660033"/>
-                </a:solidFill>
-                <a:latin typeface="微軟正黑體" pitchFamily="34" charset="-120"/>
-                <a:ea typeface="微軟正黑體" pitchFamily="34" charset="-120"/>
-              </a:rPr>
-              <a:t>是</a:t>
-            </a:r>
-            <a:r>
-              <a:rPr lang="zh-CN" altLang="en-US" sz="4800" b="1" dirty="0" smtClean="0">
+              <a:t>的四圍；公義和公平是</a:t>
+            </a:r>
+            <a:r>
+              <a:rPr lang="zh-CN" altLang="en-US" sz="4800" b="1" dirty="0">
                 <a:solidFill>
                   <a:srgbClr val="660033"/>
                 </a:solidFill>
@@ -4120,16 +3951,6 @@
               <a:t>祂</a:t>
             </a:r>
             <a:r>
-              <a:rPr lang="zh-TW" altLang="en-US" sz="4800" b="1" dirty="0" smtClean="0">
-                <a:solidFill>
-                  <a:srgbClr val="660033"/>
-                </a:solidFill>
-                <a:latin typeface="微軟正黑體" pitchFamily="34" charset="-120"/>
-                <a:ea typeface="微軟正黑體" pitchFamily="34" charset="-120"/>
-              </a:rPr>
-              <a:t>寶</a:t>
-            </a:r>
-            <a:r>
               <a:rPr lang="zh-TW" altLang="en-US" sz="4800" b="1" dirty="0">
                 <a:solidFill>
                   <a:srgbClr val="660033"/>
@@ -4137,7 +3958,7 @@
                 <a:latin typeface="微軟正黑體" pitchFamily="34" charset="-120"/>
                 <a:ea typeface="微軟正黑體" pitchFamily="34" charset="-120"/>
               </a:rPr>
-              <a:t>座的根基。</a:t>
+              <a:t>寶座的根基。</a:t>
             </a:r>
             <a:endParaRPr lang="en-US" altLang="zh-TW" sz="4800" b="1" dirty="0">
               <a:solidFill>
@@ -4209,20 +4030,10 @@
                 <a:latin typeface="微軟正黑體" pitchFamily="34" charset="-120"/>
                 <a:ea typeface="微軟正黑體" pitchFamily="34" charset="-120"/>
               </a:rPr>
-              <a:t>有烈火</a:t>
-            </a:r>
-            <a:r>
-              <a:rPr lang="zh-TW" altLang="en-US" sz="4800" dirty="0" smtClean="0">
-                <a:solidFill>
-                  <a:srgbClr val="660033"/>
-                </a:solidFill>
-                <a:latin typeface="微軟正黑體" pitchFamily="34" charset="-120"/>
-                <a:ea typeface="微軟正黑體" pitchFamily="34" charset="-120"/>
-              </a:rPr>
-              <a:t>在</a:t>
-            </a:r>
-            <a:r>
-              <a:rPr lang="zh-CN" altLang="en-US" sz="4800" dirty="0" smtClean="0">
+              <a:t>有烈火在</a:t>
+            </a:r>
+            <a:r>
+              <a:rPr lang="zh-CN" altLang="en-US" sz="4800" dirty="0">
                 <a:solidFill>
                   <a:srgbClr val="660033"/>
                 </a:solidFill>
@@ -4232,16 +4043,6 @@
               <a:t>祂</a:t>
             </a:r>
             <a:r>
-              <a:rPr lang="zh-TW" altLang="en-US" sz="4800" dirty="0" smtClean="0">
-                <a:solidFill>
-                  <a:srgbClr val="660033"/>
-                </a:solidFill>
-                <a:latin typeface="微軟正黑體" pitchFamily="34" charset="-120"/>
-                <a:ea typeface="微軟正黑體" pitchFamily="34" charset="-120"/>
-              </a:rPr>
-              <a:t>前</a:t>
-            </a:r>
-            <a:r>
               <a:rPr lang="zh-TW" altLang="en-US" sz="4800" dirty="0">
                 <a:solidFill>
                   <a:srgbClr val="660033"/>
@@ -4249,17 +4050,7 @@
                 <a:latin typeface="微軟正黑體" pitchFamily="34" charset="-120"/>
                 <a:ea typeface="微軟正黑體" pitchFamily="34" charset="-120"/>
               </a:rPr>
-              <a:t>頭行，燒</a:t>
-            </a:r>
-            <a:r>
-              <a:rPr lang="zh-TW" altLang="en-US" sz="4800" dirty="0" smtClean="0">
-                <a:solidFill>
-                  <a:srgbClr val="660033"/>
-                </a:solidFill>
-                <a:latin typeface="微軟正黑體" pitchFamily="34" charset="-120"/>
-                <a:ea typeface="微軟正黑體" pitchFamily="34" charset="-120"/>
-              </a:rPr>
-              <a:t>滅</a:t>
+              <a:t>前頭行，燒滅</a:t>
             </a:r>
             <a:r>
               <a:rPr lang="zh-CN" altLang="en-US" sz="4800" dirty="0">
@@ -4272,16 +4063,6 @@
               <a:t>祂</a:t>
             </a:r>
             <a:r>
-              <a:rPr lang="zh-TW" altLang="en-US" sz="4800" dirty="0" smtClean="0">
-                <a:solidFill>
-                  <a:srgbClr val="660033"/>
-                </a:solidFill>
-                <a:latin typeface="微軟正黑體" pitchFamily="34" charset="-120"/>
-                <a:ea typeface="微軟正黑體" pitchFamily="34" charset="-120"/>
-              </a:rPr>
-              <a:t>四</a:t>
-            </a:r>
-            <a:r>
               <a:rPr lang="zh-TW" altLang="en-US" sz="4800" dirty="0">
                 <a:solidFill>
                   <a:srgbClr val="660033"/>
@@ -4289,17 +4070,7 @@
                 <a:latin typeface="微軟正黑體" pitchFamily="34" charset="-120"/>
                 <a:ea typeface="微軟正黑體" pitchFamily="34" charset="-120"/>
               </a:rPr>
-              <a:t>圍的敵人</a:t>
-            </a:r>
-            <a:r>
-              <a:rPr lang="zh-TW" altLang="en-US" sz="4800" dirty="0" smtClean="0">
-                <a:solidFill>
-                  <a:srgbClr val="660033"/>
-                </a:solidFill>
-                <a:latin typeface="微軟正黑體" pitchFamily="34" charset="-120"/>
-                <a:ea typeface="微軟正黑體" pitchFamily="34" charset="-120"/>
-              </a:rPr>
-              <a:t>。</a:t>
+              <a:t>四圍的敵人。</a:t>
             </a:r>
             <a:r>
               <a:rPr lang="zh-CN" altLang="en-US" sz="4800" dirty="0">
@@ -4312,16 +4083,6 @@
               <a:t>祂</a:t>
             </a:r>
             <a:r>
-              <a:rPr lang="zh-TW" altLang="en-US" sz="4800" dirty="0" smtClean="0">
-                <a:solidFill>
-                  <a:srgbClr val="660033"/>
-                </a:solidFill>
-                <a:latin typeface="微軟正黑體" pitchFamily="34" charset="-120"/>
-                <a:ea typeface="微軟正黑體" pitchFamily="34" charset="-120"/>
-              </a:rPr>
-              <a:t>的</a:t>
-            </a:r>
-            <a:r>
               <a:rPr lang="zh-TW" altLang="en-US" sz="4800" dirty="0">
                 <a:solidFill>
                   <a:srgbClr val="660033"/>
@@ -4329,7 +4090,7 @@
                 <a:latin typeface="微軟正黑體" pitchFamily="34" charset="-120"/>
                 <a:ea typeface="微軟正黑體" pitchFamily="34" charset="-120"/>
               </a:rPr>
-              <a:t>閃電光照世界，大地看見便震動。</a:t>
+              <a:t>的閃電光照世界，大地看見便震動。</a:t>
             </a:r>
             <a:r>
               <a:rPr lang="en-US" altLang="zh-TW" sz="4800" dirty="0">
@@ -4426,17 +4187,7 @@
                 <a:latin typeface="微軟正黑體" pitchFamily="34" charset="-120"/>
                 <a:ea typeface="微軟正黑體" pitchFamily="34" charset="-120"/>
               </a:rPr>
-              <a:t>諸天表</a:t>
-            </a:r>
-            <a:r>
-              <a:rPr lang="zh-TW" altLang="en-US" sz="4800" dirty="0" smtClean="0">
-                <a:solidFill>
-                  <a:srgbClr val="660033"/>
-                </a:solidFill>
-                <a:latin typeface="微軟正黑體" pitchFamily="34" charset="-120"/>
-                <a:ea typeface="微軟正黑體" pitchFamily="34" charset="-120"/>
-              </a:rPr>
-              <a:t>明</a:t>
+              <a:t>諸天表明</a:t>
             </a:r>
             <a:r>
               <a:rPr lang="zh-CN" altLang="en-US" sz="4800" dirty="0">
@@ -4449,16 +4200,6 @@
               <a:t>祂</a:t>
             </a:r>
             <a:r>
-              <a:rPr lang="zh-TW" altLang="en-US" sz="4800" dirty="0" smtClean="0">
-                <a:solidFill>
-                  <a:srgbClr val="660033"/>
-                </a:solidFill>
-                <a:latin typeface="微軟正黑體" pitchFamily="34" charset="-120"/>
-                <a:ea typeface="微軟正黑體" pitchFamily="34" charset="-120"/>
-              </a:rPr>
-              <a:t>的</a:t>
-            </a:r>
-            <a:r>
               <a:rPr lang="zh-TW" altLang="en-US" sz="4800" dirty="0">
                 <a:solidFill>
                   <a:srgbClr val="660033"/>
@@ -4466,17 +4207,7 @@
                 <a:latin typeface="微軟正黑體" pitchFamily="34" charset="-120"/>
                 <a:ea typeface="微軟正黑體" pitchFamily="34" charset="-120"/>
               </a:rPr>
-              <a:t>公義；萬民看</a:t>
-            </a:r>
-            <a:r>
-              <a:rPr lang="zh-TW" altLang="en-US" sz="4800" dirty="0" smtClean="0">
-                <a:solidFill>
-                  <a:srgbClr val="660033"/>
-                </a:solidFill>
-                <a:latin typeface="微軟正黑體" pitchFamily="34" charset="-120"/>
-                <a:ea typeface="微軟正黑體" pitchFamily="34" charset="-120"/>
-              </a:rPr>
-              <a:t>見</a:t>
+              <a:t>的公義；萬民看見</a:t>
             </a:r>
             <a:r>
               <a:rPr lang="zh-CN" altLang="en-US" sz="4800" dirty="0">
@@ -4489,16 +4220,6 @@
               <a:t>祂</a:t>
             </a:r>
             <a:r>
-              <a:rPr lang="zh-TW" altLang="en-US" sz="4800" dirty="0" smtClean="0">
-                <a:solidFill>
-                  <a:srgbClr val="660033"/>
-                </a:solidFill>
-                <a:latin typeface="微軟正黑體" pitchFamily="34" charset="-120"/>
-                <a:ea typeface="微軟正黑體" pitchFamily="34" charset="-120"/>
-              </a:rPr>
-              <a:t>的</a:t>
-            </a:r>
-            <a:r>
               <a:rPr lang="zh-TW" altLang="en-US" sz="4800" dirty="0">
                 <a:solidFill>
                   <a:srgbClr val="660033"/>
@@ -4506,7 +4227,7 @@
                 <a:latin typeface="微軟正黑體" pitchFamily="34" charset="-120"/>
                 <a:ea typeface="微軟正黑體" pitchFamily="34" charset="-120"/>
               </a:rPr>
-              <a:t>榮耀。</a:t>
+              <a:t>的榮耀。</a:t>
             </a:r>
             <a:r>
               <a:rPr lang="en-US" altLang="zh-TW" sz="4800" dirty="0">
